--- a/CalendarioAgo26/Presentaciones/8_1_ACLs.pptx
+++ b/CalendarioAgo26/Presentaciones/8_1_ACLs.pptx
@@ -141,6 +141,27 @@
 </p:presentation>
 </file>
 
+<file path=ppt/changesInfos/changesInfo1.xml><?xml version="1.0" encoding="utf-8"?>
+<pc:chgInfo xmlns:a="http://schemas.openxmlformats.org/drawingml/2006/main" xmlns:r="http://schemas.openxmlformats.org/officeDocument/2006/relationships" xmlns:ac="http://schemas.microsoft.com/office/drawing/2013/main/command" xmlns:pc="http://schemas.microsoft.com/office/powerpoint/2013/main/command">
+  <pc:docChgLst>
+    <pc:chgData name="Lizethe Pérez Fuertes" userId="4ae9ef87-2a7d-42f8-8dfa-0a501a9e2ff4" providerId="ADAL" clId="{FDDD45CB-1330-4033-A842-3D2746AFF7C7}"/>
+    <pc:docChg chg="modSld sldOrd">
+      <pc:chgData name="Lizethe Pérez Fuertes" userId="4ae9ef87-2a7d-42f8-8dfa-0a501a9e2ff4" providerId="ADAL" clId="{FDDD45CB-1330-4033-A842-3D2746AFF7C7}" dt="2026-09-28T15:16:17.272" v="1"/>
+      <pc:docMkLst>
+        <pc:docMk/>
+      </pc:docMkLst>
+      <pc:sldChg chg="ord">
+        <pc:chgData name="Lizethe Pérez Fuertes" userId="4ae9ef87-2a7d-42f8-8dfa-0a501a9e2ff4" providerId="ADAL" clId="{FDDD45CB-1330-4033-A842-3D2746AFF7C7}" dt="2026-09-28T15:16:17.272" v="1"/>
+        <pc:sldMkLst>
+          <pc:docMk/>
+          <pc:sldMk cId="0" sldId="265"/>
+        </pc:sldMkLst>
+      </pc:sldChg>
+    </pc:docChg>
+  </pc:docChgLst>
+</pc:chgInfo>
+</file>
+
 <file path=ppt/notesMasters/notesMaster1.xml><?xml version="1.0" encoding="utf-8"?>
 <p:notesMaster xmlns:a="http://schemas.openxmlformats.org/drawingml/2006/main" xmlns:r="http://schemas.openxmlformats.org/officeDocument/2006/relationships" xmlns:p="http://schemas.openxmlformats.org/presentationml/2006/main">
   <p:cSld>
@@ -223,7 +244,7 @@
           <a:p>
             <a:fld id="{2D445F07-8756-451B-A938-0248325FC7BB}" type="datetimeFigureOut">
               <a:rPr lang="es-MX" smtClean="0"/>
-              <a:t>20/03/2025</a:t>
+              <a:t>28/09/2026</a:t>
             </a:fld>
             <a:endParaRPr lang="es-MX" dirty="0"/>
           </a:p>
@@ -382,7 +403,7 @@
           <a:p>
             <a:fld id="{5993AEC0-242E-4FA7-9D3C-51E1036AC3CB}" type="slidenum">
               <a:rPr lang="es-MX" smtClean="0"/>
-              <a:t>‹#›</a:t>
+              <a:t>‹Nº›</a:t>
             </a:fld>
             <a:endParaRPr lang="es-MX" dirty="0"/>
           </a:p>
@@ -1847,7 +1868,7 @@
           <a:p>
             <a:fld id="{5E75A0DC-66C6-4CEC-A5EB-F8C97CEC3796}" type="datetimeFigureOut">
               <a:rPr lang="es-MX" smtClean="0"/>
-              <a:t>20/03/2025</a:t>
+              <a:t>28/09/2026</a:t>
             </a:fld>
             <a:endParaRPr lang="es-MX" dirty="0"/>
           </a:p>
@@ -1889,7 +1910,7 @@
           <a:p>
             <a:fld id="{C077EE1E-7A06-4E7F-9AFB-189FC69B7B0C}" type="slidenum">
               <a:rPr lang="es-MX" smtClean="0"/>
-              <a:t>‹#›</a:t>
+              <a:t>‹Nº›</a:t>
             </a:fld>
             <a:endParaRPr lang="es-MX" dirty="0"/>
           </a:p>
@@ -2017,7 +2038,7 @@
           <a:p>
             <a:fld id="{5E75A0DC-66C6-4CEC-A5EB-F8C97CEC3796}" type="datetimeFigureOut">
               <a:rPr lang="es-MX" smtClean="0"/>
-              <a:t>20/03/2025</a:t>
+              <a:t>28/09/2026</a:t>
             </a:fld>
             <a:endParaRPr lang="es-MX" dirty="0"/>
           </a:p>
@@ -2059,7 +2080,7 @@
           <a:p>
             <a:fld id="{C077EE1E-7A06-4E7F-9AFB-189FC69B7B0C}" type="slidenum">
               <a:rPr lang="es-MX" smtClean="0"/>
-              <a:t>‹#›</a:t>
+              <a:t>‹Nº›</a:t>
             </a:fld>
             <a:endParaRPr lang="es-MX" dirty="0"/>
           </a:p>
@@ -2197,7 +2218,7 @@
           <a:p>
             <a:fld id="{5E75A0DC-66C6-4CEC-A5EB-F8C97CEC3796}" type="datetimeFigureOut">
               <a:rPr lang="es-MX" smtClean="0"/>
-              <a:t>20/03/2025</a:t>
+              <a:t>28/09/2026</a:t>
             </a:fld>
             <a:endParaRPr lang="es-MX" dirty="0"/>
           </a:p>
@@ -2239,7 +2260,7 @@
           <a:p>
             <a:fld id="{C077EE1E-7A06-4E7F-9AFB-189FC69B7B0C}" type="slidenum">
               <a:rPr lang="es-MX" smtClean="0"/>
-              <a:t>‹#›</a:t>
+              <a:t>‹Nº›</a:t>
             </a:fld>
             <a:endParaRPr lang="es-MX" dirty="0"/>
           </a:p>
@@ -2411,7 +2432,7 @@
         <p:fade/>
       </p:transition>
     </mc:Choice>
-    <mc:Fallback xmlns:c="http://schemas.openxmlformats.org/drawingml/2006/chart" xmlns:c15="http://schemas.microsoft.com/office/drawing/2012/chart" xmlns="">
+    <mc:Fallback xmlns="" xmlns:c15="http://schemas.microsoft.com/office/drawing/2012/chart" xmlns:c="http://schemas.openxmlformats.org/drawingml/2006/chart">
       <p:transition xmlns:p14="http://schemas.microsoft.com/office/powerpoint/2010/main" spd="med">
         <p:fade/>
       </p:transition>
@@ -2529,7 +2550,7 @@
           <a:p>
             <a:fld id="{5E75A0DC-66C6-4CEC-A5EB-F8C97CEC3796}" type="datetimeFigureOut">
               <a:rPr lang="es-MX" smtClean="0"/>
-              <a:t>20/03/2025</a:t>
+              <a:t>28/09/2026</a:t>
             </a:fld>
             <a:endParaRPr lang="es-MX" dirty="0"/>
           </a:p>
@@ -2571,7 +2592,7 @@
           <a:p>
             <a:fld id="{C077EE1E-7A06-4E7F-9AFB-189FC69B7B0C}" type="slidenum">
               <a:rPr lang="es-MX" smtClean="0"/>
-              <a:t>‹#›</a:t>
+              <a:t>‹Nº›</a:t>
             </a:fld>
             <a:endParaRPr lang="es-MX" dirty="0"/>
           </a:p>
@@ -2775,7 +2796,7 @@
           <a:p>
             <a:fld id="{5E75A0DC-66C6-4CEC-A5EB-F8C97CEC3796}" type="datetimeFigureOut">
               <a:rPr lang="es-MX" smtClean="0"/>
-              <a:t>20/03/2025</a:t>
+              <a:t>28/09/2026</a:t>
             </a:fld>
             <a:endParaRPr lang="es-MX" dirty="0"/>
           </a:p>
@@ -2817,7 +2838,7 @@
           <a:p>
             <a:fld id="{C077EE1E-7A06-4E7F-9AFB-189FC69B7B0C}" type="slidenum">
               <a:rPr lang="es-MX" smtClean="0"/>
-              <a:t>‹#›</a:t>
+              <a:t>‹Nº›</a:t>
             </a:fld>
             <a:endParaRPr lang="es-MX" dirty="0"/>
           </a:p>
@@ -3063,7 +3084,7 @@
           <a:p>
             <a:fld id="{5E75A0DC-66C6-4CEC-A5EB-F8C97CEC3796}" type="datetimeFigureOut">
               <a:rPr lang="es-MX" smtClean="0"/>
-              <a:t>20/03/2025</a:t>
+              <a:t>28/09/2026</a:t>
             </a:fld>
             <a:endParaRPr lang="es-MX" dirty="0"/>
           </a:p>
@@ -3105,7 +3126,7 @@
           <a:p>
             <a:fld id="{C077EE1E-7A06-4E7F-9AFB-189FC69B7B0C}" type="slidenum">
               <a:rPr lang="es-MX" smtClean="0"/>
-              <a:t>‹#›</a:t>
+              <a:t>‹Nº›</a:t>
             </a:fld>
             <a:endParaRPr lang="es-MX" dirty="0"/>
           </a:p>
@@ -3485,7 +3506,7 @@
           <a:p>
             <a:fld id="{5E75A0DC-66C6-4CEC-A5EB-F8C97CEC3796}" type="datetimeFigureOut">
               <a:rPr lang="es-MX" smtClean="0"/>
-              <a:t>20/03/2025</a:t>
+              <a:t>28/09/2026</a:t>
             </a:fld>
             <a:endParaRPr lang="es-MX" dirty="0"/>
           </a:p>
@@ -3527,7 +3548,7 @@
           <a:p>
             <a:fld id="{C077EE1E-7A06-4E7F-9AFB-189FC69B7B0C}" type="slidenum">
               <a:rPr lang="es-MX" smtClean="0"/>
-              <a:t>‹#›</a:t>
+              <a:t>‹Nº›</a:t>
             </a:fld>
             <a:endParaRPr lang="es-MX" dirty="0"/>
           </a:p>
@@ -3603,7 +3624,7 @@
           <a:p>
             <a:fld id="{5E75A0DC-66C6-4CEC-A5EB-F8C97CEC3796}" type="datetimeFigureOut">
               <a:rPr lang="es-MX" smtClean="0"/>
-              <a:t>20/03/2025</a:t>
+              <a:t>28/09/2026</a:t>
             </a:fld>
             <a:endParaRPr lang="es-MX" dirty="0"/>
           </a:p>
@@ -3645,7 +3666,7 @@
           <a:p>
             <a:fld id="{C077EE1E-7A06-4E7F-9AFB-189FC69B7B0C}" type="slidenum">
               <a:rPr lang="es-MX" smtClean="0"/>
-              <a:t>‹#›</a:t>
+              <a:t>‹Nº›</a:t>
             </a:fld>
             <a:endParaRPr lang="es-MX" dirty="0"/>
           </a:p>
@@ -3698,7 +3719,7 @@
           <a:p>
             <a:fld id="{5E75A0DC-66C6-4CEC-A5EB-F8C97CEC3796}" type="datetimeFigureOut">
               <a:rPr lang="es-MX" smtClean="0"/>
-              <a:t>20/03/2025</a:t>
+              <a:t>28/09/2026</a:t>
             </a:fld>
             <a:endParaRPr lang="es-MX" dirty="0"/>
           </a:p>
@@ -3740,7 +3761,7 @@
           <a:p>
             <a:fld id="{C077EE1E-7A06-4E7F-9AFB-189FC69B7B0C}" type="slidenum">
               <a:rPr lang="es-MX" smtClean="0"/>
-              <a:t>‹#›</a:t>
+              <a:t>‹Nº›</a:t>
             </a:fld>
             <a:endParaRPr lang="es-MX" dirty="0"/>
           </a:p>
@@ -3975,7 +3996,7 @@
           <a:p>
             <a:fld id="{5E75A0DC-66C6-4CEC-A5EB-F8C97CEC3796}" type="datetimeFigureOut">
               <a:rPr lang="es-MX" smtClean="0"/>
-              <a:t>20/03/2025</a:t>
+              <a:t>28/09/2026</a:t>
             </a:fld>
             <a:endParaRPr lang="es-MX" dirty="0"/>
           </a:p>
@@ -4017,7 +4038,7 @@
           <a:p>
             <a:fld id="{C077EE1E-7A06-4E7F-9AFB-189FC69B7B0C}" type="slidenum">
               <a:rPr lang="es-MX" smtClean="0"/>
-              <a:t>‹#›</a:t>
+              <a:t>‹Nº›</a:t>
             </a:fld>
             <a:endParaRPr lang="es-MX" dirty="0"/>
           </a:p>
@@ -4228,7 +4249,7 @@
           <a:p>
             <a:fld id="{5E75A0DC-66C6-4CEC-A5EB-F8C97CEC3796}" type="datetimeFigureOut">
               <a:rPr lang="es-MX" smtClean="0"/>
-              <a:t>20/03/2025</a:t>
+              <a:t>28/09/2026</a:t>
             </a:fld>
             <a:endParaRPr lang="es-MX" dirty="0"/>
           </a:p>
@@ -4270,7 +4291,7 @@
           <a:p>
             <a:fld id="{C077EE1E-7A06-4E7F-9AFB-189FC69B7B0C}" type="slidenum">
               <a:rPr lang="es-MX" smtClean="0"/>
-              <a:t>‹#›</a:t>
+              <a:t>‹Nº›</a:t>
             </a:fld>
             <a:endParaRPr lang="es-MX" dirty="0"/>
           </a:p>
@@ -4441,7 +4462,7 @@
           <a:p>
             <a:fld id="{5E75A0DC-66C6-4CEC-A5EB-F8C97CEC3796}" type="datetimeFigureOut">
               <a:rPr lang="es-MX" smtClean="0"/>
-              <a:t>20/03/2025</a:t>
+              <a:t>28/09/2026</a:t>
             </a:fld>
             <a:endParaRPr lang="es-MX" dirty="0"/>
           </a:p>
@@ -4519,7 +4540,7 @@
           <a:p>
             <a:fld id="{C077EE1E-7A06-4E7F-9AFB-189FC69B7B0C}" type="slidenum">
               <a:rPr lang="es-MX" smtClean="0"/>
-              <a:t>‹#›</a:t>
+              <a:t>‹Nº›</a:t>
             </a:fld>
             <a:endParaRPr lang="es-MX" dirty="0"/>
           </a:p>
@@ -6497,7 +6518,7 @@
         <p:fade/>
       </p:transition>
     </mc:Choice>
-    <mc:Fallback xmlns="" xmlns:c="http://schemas.openxmlformats.org/drawingml/2006/chart" xmlns:c15="http://schemas.microsoft.com/office/drawing/2012/chart">
+    <mc:Fallback xmlns:c15="http://schemas.microsoft.com/office/drawing/2012/chart" xmlns:c="http://schemas.openxmlformats.org/drawingml/2006/chart" xmlns="">
       <p:transition spd="med">
         <p:fade/>
       </p:transition>
@@ -6669,7 +6690,7 @@
         <p:fade/>
       </p:transition>
     </mc:Choice>
-    <mc:Fallback xmlns="" xmlns:c="http://schemas.openxmlformats.org/drawingml/2006/chart" xmlns:c15="http://schemas.microsoft.com/office/drawing/2012/chart">
+    <mc:Fallback xmlns:c15="http://schemas.microsoft.com/office/drawing/2012/chart" xmlns:c="http://schemas.openxmlformats.org/drawingml/2006/chart" xmlns="">
       <p:transition spd="med">
         <p:fade/>
       </p:transition>
@@ -8025,7 +8046,7 @@
         <p:fade/>
       </p:transition>
     </mc:Choice>
-    <mc:Fallback xmlns="" xmlns:c="http://schemas.openxmlformats.org/drawingml/2006/chart" xmlns:c15="http://schemas.microsoft.com/office/drawing/2012/chart">
+    <mc:Fallback xmlns:c15="http://schemas.microsoft.com/office/drawing/2012/chart" xmlns:c="http://schemas.openxmlformats.org/drawingml/2006/chart" xmlns="">
       <p:transition spd="med">
         <p:fade/>
       </p:transition>
